--- a/agentic_protocol_engineering_presentation.pptx
+++ b/agentic_protocol_engineering_presentation.pptx
@@ -3106,7 +3106,7 @@
           <a:lstStyle/>
           <a:p>
             <a:r>
-              <a:t>🚀 Agentic Protocol Engineering</a:t>
+              <a:t>Agentic Protocol Engineering</a:t>
             </a:r>
           </a:p>
         </p:txBody>
